--- a/generated/Tier 1 Broker Scorecards/United Advantage Insurance Services_Broker_Scorecard.pptx
+++ b/generated/Tier 1 Broker Scorecards/United Advantage Insurance Services_Broker_Scorecard.pptx
@@ -3357,7 +3357,7 @@
                         <a:rPr sz="800">
                           <a:latin typeface="Segoe UI"/>
                         </a:rPr>
-                        <a:t>$5,313,121.90 / $7,480,898.95 / $3,562,816.46</a:t>
+                        <a:t>$5,313,121.90 / $7,493,247.59 / $3,575,165.10</a:t>
                       </a:r>
                     </a:p>
                   </a:txBody>
@@ -3394,7 +3394,7 @@
                         <a:rPr sz="900">
                           <a:latin typeface="Segoe UI"/>
                         </a:rPr>
-                        <a:t>Tier 1  |  5.49% / 15.00%</a:t>
+                        <a:t>Tier 1  |  5.47% / 15.00%</a:t>
                       </a:r>
                     </a:p>
                   </a:txBody>
@@ -3431,7 +3431,7 @@
                         <a:rPr sz="900">
                           <a:latin typeface="Segoe UI"/>
                         </a:rPr>
-                        <a:t>$7,438,370.66  (47.9% achieved)</a:t>
+                        <a:t>$7,438,370.66  (48.1% achieved)</a:t>
                       </a:r>
                     </a:p>
                   </a:txBody>
@@ -3653,7 +3653,7 @@
                         <a:rPr sz="900">
                           <a:latin typeface="Segoe UI"/>
                         </a:rPr>
-                        <a:t>Fleet Subs: 137  |  Binds: 11</a:t>
+                        <a:t>Fleet Subs: 137  |  Binds: 12</a:t>
                       </a:r>
                     </a:p>
                   </a:txBody>
@@ -3690,7 +3690,7 @@
                         <a:rPr sz="900">
                           <a:latin typeface="Segoe UI"/>
                         </a:rPr>
-                        <a:t>Fleet Bound Premium: $869,194.55</a:t>
+                        <a:t>Fleet Bound Premium: $967,049.86</a:t>
                       </a:r>
                     </a:p>
                   </a:txBody>
@@ -3727,7 +3727,7 @@
                         <a:rPr sz="900">
                           <a:latin typeface="Segoe UI"/>
                         </a:rPr>
-                        <a:t>Fleet Book %: 24.4%</a:t>
+                        <a:t>Fleet Book %: 27.0%</a:t>
                       </a:r>
                     </a:p>
                   </a:txBody>
@@ -3766,7 +3766,7 @@
                         <a:rPr sz="900">
                           <a:latin typeface="Segoe UI"/>
                         </a:rPr>
-                        <a:t>Non-Fleet Subs: 2724  |  Binds: 146</a:t>
+                        <a:t>Non-Fleet Subs: 2750  |  Binds: 146</a:t>
                       </a:r>
                     </a:p>
                   </a:txBody>
@@ -3803,7 +3803,7 @@
                         <a:rPr sz="900">
                           <a:latin typeface="Segoe UI"/>
                         </a:rPr>
-                        <a:t>Non-Fleet Bound Premium: $2,693,621.91</a:t>
+                        <a:t>Non-Fleet Bound Premium: $2,608,115.24</a:t>
                       </a:r>
                     </a:p>
                   </a:txBody>
@@ -3840,7 +3840,7 @@
                         <a:rPr sz="900">
                           <a:latin typeface="Segoe UI"/>
                         </a:rPr>
-                        <a:t>Non-Fleet Book %: 75.6%</a:t>
+                        <a:t>Non-Fleet Book %: 73.0%</a:t>
                       </a:r>
                     </a:p>
                   </a:txBody>
@@ -4424,11 +4424,11 @@
                       <a:r>
                         <a:rPr sz="800">
                           <a:solidFill>
-                            <a:srgbClr val="DC2626"/>
+                            <a:srgbClr val="059669"/>
                           </a:solidFill>
                           <a:latin typeface="Segoe UI"/>
                         </a:rPr>
-                        <a:t>390</a:t>
+                        <a:t>422</a:t>
                       </a:r>
                     </a:p>
                   </a:txBody>
@@ -4581,7 +4581,7 @@
                         <a:rPr sz="800">
                           <a:latin typeface="Segoe UI"/>
                         </a:rPr>
-                        <a:t>9.2%</a:t>
+                        <a:t>9.0%</a:t>
                       </a:r>
                     </a:p>
                   </a:txBody>
@@ -4624,7 +4624,7 @@
                           </a:solidFill>
                           <a:latin typeface="Segoe UI"/>
                         </a:rPr>
-                        <a:t>10.4%</a:t>
+                        <a:t>10.6%</a:t>
                       </a:r>
                     </a:p>
                   </a:txBody>
@@ -4707,7 +4707,7 @@
                           </a:solidFill>
                           <a:latin typeface="Segoe UI"/>
                         </a:rPr>
-                        <a:t>10.8%</a:t>
+                        <a:t>10.9%</a:t>
                       </a:r>
                     </a:p>
                   </a:txBody>
@@ -4747,7 +4747,7 @@
                         <a:rPr sz="800">
                           <a:latin typeface="Segoe UI"/>
                         </a:rPr>
-                        <a:t>13.3%</a:t>
+                        <a:t>13.0%</a:t>
                       </a:r>
                     </a:p>
                   </a:txBody>
@@ -4866,7 +4866,7 @@
                         <a:rPr sz="800">
                           <a:latin typeface="Segoe UI"/>
                         </a:rPr>
-                        <a:t>46</a:t>
+                        <a:t>45</a:t>
                       </a:r>
                     </a:p>
                   </a:txBody>
@@ -4906,7 +4906,7 @@
                           </a:solidFill>
                           <a:latin typeface="Segoe UI"/>
                         </a:rPr>
-                        <a:t>79</a:t>
+                        <a:t>81</a:t>
                       </a:r>
                     </a:p>
                   </a:txBody>
@@ -4983,7 +4983,7 @@
                           </a:solidFill>
                           <a:latin typeface="Segoe UI"/>
                         </a:rPr>
-                        <a:t>42</a:t>
+                        <a:t>46</a:t>
                       </a:r>
                     </a:p>
                   </a:txBody>
@@ -5020,7 +5020,7 @@
                         <a:rPr sz="800">
                           <a:latin typeface="Segoe UI"/>
                         </a:rPr>
-                        <a:t>51</a:t>
+                        <a:t>50</a:t>
                       </a:r>
                     </a:p>
                   </a:txBody>
@@ -5262,7 +5262,7 @@
                           </a:solidFill>
                           <a:latin typeface="Segoe UI"/>
                         </a:rPr>
-                        <a:t>$580.0K</a:t>
+                        <a:t>$592.3K</a:t>
                       </a:r>
                     </a:p>
                   </a:txBody>

--- a/generated/Tier 1 Broker Scorecards/United Advantage Insurance Services_Broker_Scorecard.pptx
+++ b/generated/Tier 1 Broker Scorecards/United Advantage Insurance Services_Broker_Scorecard.pptx
@@ -3394,7 +3394,7 @@
                         <a:rPr sz="900">
                           <a:latin typeface="Segoe UI"/>
                         </a:rPr>
-                        <a:t>Tier 1  |  5.47% / 15.00%</a:t>
+                        <a:t>Tier 1  |  5.50% / 15.00%</a:t>
                       </a:r>
                     </a:p>
                   </a:txBody>
@@ -3653,7 +3653,7 @@
                         <a:rPr sz="900">
                           <a:latin typeface="Segoe UI"/>
                         </a:rPr>
-                        <a:t>Fleet Subs: 137  |  Binds: 12</a:t>
+                        <a:t>Fleet Subs: 138  |  Binds: 12</a:t>
                       </a:r>
                     </a:p>
                   </a:txBody>
@@ -3690,7 +3690,7 @@
                         <a:rPr sz="900">
                           <a:latin typeface="Segoe UI"/>
                         </a:rPr>
-                        <a:t>Fleet Bound Premium: $967,049.86</a:t>
+                        <a:t>Fleet Bound Premium: $959,907.95</a:t>
                       </a:r>
                     </a:p>
                   </a:txBody>
@@ -3727,7 +3727,7 @@
                         <a:rPr sz="900">
                           <a:latin typeface="Segoe UI"/>
                         </a:rPr>
-                        <a:t>Fleet Book %: 27.0%</a:t>
+                        <a:t>Fleet Book %: 26.8%</a:t>
                       </a:r>
                     </a:p>
                   </a:txBody>
@@ -3766,7 +3766,7 @@
                         <a:rPr sz="900">
                           <a:latin typeface="Segoe UI"/>
                         </a:rPr>
-                        <a:t>Non-Fleet Subs: 2750  |  Binds: 146</a:t>
+                        <a:t>Non-Fleet Subs: 2773  |  Binds: 148</a:t>
                       </a:r>
                     </a:p>
                   </a:txBody>
@@ -3803,7 +3803,7 @@
                         <a:rPr sz="900">
                           <a:latin typeface="Segoe UI"/>
                         </a:rPr>
-                        <a:t>Non-Fleet Bound Premium: $2,608,115.24</a:t>
+                        <a:t>Non-Fleet Bound Premium: $2,615,257.15</a:t>
                       </a:r>
                     </a:p>
                   </a:txBody>
@@ -3840,7 +3840,7 @@
                         <a:rPr sz="900">
                           <a:latin typeface="Segoe UI"/>
                         </a:rPr>
-                        <a:t>Non-Fleet Book %: 73.0%</a:t>
+                        <a:t>Non-Fleet Book %: 73.2%</a:t>
                       </a:r>
                     </a:p>
                   </a:txBody>
@@ -4428,7 +4428,7 @@
                           </a:solidFill>
                           <a:latin typeface="Segoe UI"/>
                         </a:rPr>
-                        <a:t>422</a:t>
+                        <a:t>450</a:t>
                       </a:r>
                     </a:p>
                   </a:txBody>
@@ -4581,7 +4581,7 @@
                         <a:rPr sz="800">
                           <a:latin typeface="Segoe UI"/>
                         </a:rPr>
-                        <a:t>9.0%</a:t>
+                        <a:t>9.2%</a:t>
                       </a:r>
                     </a:p>
                   </a:txBody>
@@ -4664,7 +4664,7 @@
                         <a:rPr sz="800">
                           <a:latin typeface="Segoe UI"/>
                         </a:rPr>
-                        <a:t>13.0%</a:t>
+                        <a:t>13.3%</a:t>
                       </a:r>
                     </a:p>
                   </a:txBody>
@@ -4707,7 +4707,7 @@
                           </a:solidFill>
                           <a:latin typeface="Segoe UI"/>
                         </a:rPr>
-                        <a:t>10.9%</a:t>
+                        <a:t>10.4%</a:t>
                       </a:r>
                     </a:p>
                   </a:txBody>
@@ -4747,7 +4747,7 @@
                         <a:rPr sz="800">
                           <a:latin typeface="Segoe UI"/>
                         </a:rPr>
-                        <a:t>13.0%</a:t>
+                        <a:t>13.3%</a:t>
                       </a:r>
                     </a:p>
                   </a:txBody>
@@ -4866,7 +4866,7 @@
                         <a:rPr sz="800">
                           <a:latin typeface="Segoe UI"/>
                         </a:rPr>
-                        <a:t>45</a:t>
+                        <a:t>46</a:t>
                       </a:r>
                     </a:p>
                   </a:txBody>
@@ -4943,7 +4943,7 @@
                         <a:rPr sz="800">
                           <a:latin typeface="Segoe UI"/>
                         </a:rPr>
-                        <a:t>54</a:t>
+                        <a:t>55</a:t>
                       </a:r>
                     </a:p>
                   </a:txBody>
@@ -4983,7 +4983,7 @@
                           </a:solidFill>
                           <a:latin typeface="Segoe UI"/>
                         </a:rPr>
-                        <a:t>46</a:t>
+                        <a:t>47</a:t>
                       </a:r>
                     </a:p>
                   </a:txBody>
@@ -5020,7 +5020,7 @@
                         <a:rPr sz="800">
                           <a:latin typeface="Segoe UI"/>
                         </a:rPr>
-                        <a:t>50</a:t>
+                        <a:t>51</a:t>
                       </a:r>
                     </a:p>
                   </a:txBody>

--- a/generated/Tier 1 Broker Scorecards/United Advantage Insurance Services_Broker_Scorecard.pptx
+++ b/generated/Tier 1 Broker Scorecards/United Advantage Insurance Services_Broker_Scorecard.pptx
@@ -3357,7 +3357,7 @@
                         <a:rPr sz="800">
                           <a:latin typeface="Segoe UI"/>
                         </a:rPr>
-                        <a:t>$5,313,121.90 / $7,493,247.59 / $3,575,165.10</a:t>
+                        <a:t>$5,313,121.90 / $7,505,471.29 / $3,587,388.80</a:t>
                       </a:r>
                     </a:p>
                   </a:txBody>
@@ -3394,7 +3394,7 @@
                         <a:rPr sz="900">
                           <a:latin typeface="Segoe UI"/>
                         </a:rPr>
-                        <a:t>Tier 1  |  5.50% / 15.00%</a:t>
+                        <a:t>Tier 1  |  5.52% / 15.00%</a:t>
                       </a:r>
                     </a:p>
                   </a:txBody>
@@ -3431,7 +3431,7 @@
                         <a:rPr sz="900">
                           <a:latin typeface="Segoe UI"/>
                         </a:rPr>
-                        <a:t>$7,438,370.66  (48.1% achieved)</a:t>
+                        <a:t>$7,438,370.66  (48.2% achieved)</a:t>
                       </a:r>
                     </a:p>
                   </a:txBody>
@@ -3690,7 +3690,7 @@
                         <a:rPr sz="900">
                           <a:latin typeface="Segoe UI"/>
                         </a:rPr>
-                        <a:t>Fleet Bound Premium: $959,907.95</a:t>
+                        <a:t>Fleet Bound Premium: $937,429.33</a:t>
                       </a:r>
                     </a:p>
                   </a:txBody>
@@ -3727,7 +3727,7 @@
                         <a:rPr sz="900">
                           <a:latin typeface="Segoe UI"/>
                         </a:rPr>
-                        <a:t>Fleet Book %: 26.8%</a:t>
+                        <a:t>Fleet Book %: 26.1%</a:t>
                       </a:r>
                     </a:p>
                   </a:txBody>
@@ -3766,7 +3766,7 @@
                         <a:rPr sz="900">
                           <a:latin typeface="Segoe UI"/>
                         </a:rPr>
-                        <a:t>Non-Fleet Subs: 2773  |  Binds: 148</a:t>
+                        <a:t>Non-Fleet Subs: 2795  |  Binds: 150</a:t>
                       </a:r>
                     </a:p>
                   </a:txBody>
@@ -3803,7 +3803,7 @@
                         <a:rPr sz="900">
                           <a:latin typeface="Segoe UI"/>
                         </a:rPr>
-                        <a:t>Non-Fleet Bound Premium: $2,615,257.15</a:t>
+                        <a:t>Non-Fleet Bound Premium: $2,649,959.47</a:t>
                       </a:r>
                     </a:p>
                   </a:txBody>
@@ -3840,7 +3840,7 @@
                         <a:rPr sz="900">
                           <a:latin typeface="Segoe UI"/>
                         </a:rPr>
-                        <a:t>Non-Fleet Book %: 73.2%</a:t>
+                        <a:t>Non-Fleet Book %: 73.9%</a:t>
                       </a:r>
                     </a:p>
                   </a:txBody>
@@ -4428,7 +4428,7 @@
                           </a:solidFill>
                           <a:latin typeface="Segoe UI"/>
                         </a:rPr>
-                        <a:t>450</a:t>
+                        <a:t>473</a:t>
                       </a:r>
                     </a:p>
                   </a:txBody>
@@ -4624,7 +4624,90 @@
                           </a:solidFill>
                           <a:latin typeface="Segoe UI"/>
                         </a:rPr>
-                        <a:t>10.6%</a:t>
+                        <a:t>10.5%</a:t>
+                      </a:r>
+                    </a:p>
+                  </a:txBody>
+                  <a:tcPr marL="114300" marR="91425" marT="45700" marB="45700">
+                    <a:solidFill>
+                      <a:srgbClr val="F5F3FF"/>
+                    </a:solidFill>
+                    <a:lnL w="6350" cap="flat" cmpd="sng">
+                      <a:solidFill>
+                        <a:srgbClr val="E5E7EB"/>
+                      </a:solidFill>
+                    </a:lnL>
+                    <a:lnR w="6350" cap="flat" cmpd="sng">
+                      <a:solidFill>
+                        <a:srgbClr val="E5E7EB"/>
+                      </a:solidFill>
+                    </a:lnR>
+                    <a:lnT w="6350" cap="flat" cmpd="sng">
+                      <a:solidFill>
+                        <a:srgbClr val="E5E7EB"/>
+                      </a:solidFill>
+                    </a:lnT>
+                    <a:lnB w="6350" cap="flat" cmpd="sng">
+                      <a:solidFill>
+                        <a:srgbClr val="E5E7EB"/>
+                      </a:solidFill>
+                    </a:lnB>
+                  </a:tcPr>
+                </a:tc>
+                <a:tc>
+                  <a:txBody>
+                    <a:bodyPr/>
+                    <a:lstStyle/>
+                    <a:p>
+                      <a:pPr algn="ctr"/>
+                      <a:r>
+                        <a:rPr sz="800">
+                          <a:latin typeface="Segoe UI"/>
+                        </a:rPr>
+                        <a:t>13.0%</a:t>
+                      </a:r>
+                    </a:p>
+                  </a:txBody>
+                  <a:tcPr marL="114300" marR="91425" marT="45700" marB="45700">
+                    <a:solidFill>
+                      <a:srgbClr val="F5F3FF"/>
+                    </a:solidFill>
+                    <a:lnL w="6350" cap="flat" cmpd="sng">
+                      <a:solidFill>
+                        <a:srgbClr val="E5E7EB"/>
+                      </a:solidFill>
+                    </a:lnL>
+                    <a:lnR w="6350" cap="flat" cmpd="sng">
+                      <a:solidFill>
+                        <a:srgbClr val="E5E7EB"/>
+                      </a:solidFill>
+                    </a:lnR>
+                    <a:lnT w="6350" cap="flat" cmpd="sng">
+                      <a:solidFill>
+                        <a:srgbClr val="E5E7EB"/>
+                      </a:solidFill>
+                    </a:lnT>
+                    <a:lnB w="6350" cap="flat" cmpd="sng">
+                      <a:solidFill>
+                        <a:srgbClr val="E5E7EB"/>
+                      </a:solidFill>
+                    </a:lnB>
+                  </a:tcPr>
+                </a:tc>
+                <a:tc>
+                  <a:txBody>
+                    <a:bodyPr/>
+                    <a:lstStyle/>
+                    <a:p>
+                      <a:pPr algn="ctr"/>
+                      <a:r>
+                        <a:rPr sz="800">
+                          <a:solidFill>
+                            <a:srgbClr val="DC2626"/>
+                          </a:solidFill>
+                          <a:latin typeface="Segoe UI"/>
+                        </a:rPr>
+                        <a:t>10.1%</a:t>
                       </a:r>
                     </a:p>
                   </a:txBody>
@@ -4702,89 +4785,6 @@
                       <a:pPr algn="ctr"/>
                       <a:r>
                         <a:rPr sz="800">
-                          <a:solidFill>
-                            <a:srgbClr val="DC2626"/>
-                          </a:solidFill>
-                          <a:latin typeface="Segoe UI"/>
-                        </a:rPr>
-                        <a:t>10.4%</a:t>
-                      </a:r>
-                    </a:p>
-                  </a:txBody>
-                  <a:tcPr marL="114300" marR="91425" marT="45700" marB="45700">
-                    <a:solidFill>
-                      <a:srgbClr val="F5F3FF"/>
-                    </a:solidFill>
-                    <a:lnL w="6350" cap="flat" cmpd="sng">
-                      <a:solidFill>
-                        <a:srgbClr val="E5E7EB"/>
-                      </a:solidFill>
-                    </a:lnL>
-                    <a:lnR w="6350" cap="flat" cmpd="sng">
-                      <a:solidFill>
-                        <a:srgbClr val="E5E7EB"/>
-                      </a:solidFill>
-                    </a:lnR>
-                    <a:lnT w="6350" cap="flat" cmpd="sng">
-                      <a:solidFill>
-                        <a:srgbClr val="E5E7EB"/>
-                      </a:solidFill>
-                    </a:lnT>
-                    <a:lnB w="6350" cap="flat" cmpd="sng">
-                      <a:solidFill>
-                        <a:srgbClr val="E5E7EB"/>
-                      </a:solidFill>
-                    </a:lnB>
-                  </a:tcPr>
-                </a:tc>
-                <a:tc>
-                  <a:txBody>
-                    <a:bodyPr/>
-                    <a:lstStyle/>
-                    <a:p>
-                      <a:pPr algn="ctr"/>
-                      <a:r>
-                        <a:rPr sz="800">
-                          <a:latin typeface="Segoe UI"/>
-                        </a:rPr>
-                        <a:t>13.3%</a:t>
-                      </a:r>
-                    </a:p>
-                  </a:txBody>
-                  <a:tcPr marL="114300" marR="91425" marT="45700" marB="45700">
-                    <a:solidFill>
-                      <a:srgbClr val="F5F3FF"/>
-                    </a:solidFill>
-                    <a:lnL w="6350" cap="flat" cmpd="sng">
-                      <a:solidFill>
-                        <a:srgbClr val="E5E7EB"/>
-                      </a:solidFill>
-                    </a:lnL>
-                    <a:lnR w="6350" cap="flat" cmpd="sng">
-                      <a:solidFill>
-                        <a:srgbClr val="E5E7EB"/>
-                      </a:solidFill>
-                    </a:lnR>
-                    <a:lnT w="6350" cap="flat" cmpd="sng">
-                      <a:solidFill>
-                        <a:srgbClr val="E5E7EB"/>
-                      </a:solidFill>
-                    </a:lnT>
-                    <a:lnB w="6350" cap="flat" cmpd="sng">
-                      <a:solidFill>
-                        <a:srgbClr val="E5E7EB"/>
-                      </a:solidFill>
-                    </a:lnB>
-                  </a:tcPr>
-                </a:tc>
-                <a:tc>
-                  <a:txBody>
-                    <a:bodyPr/>
-                    <a:lstStyle/>
-                    <a:p>
-                      <a:pPr algn="ctr"/>
-                      <a:r>
-                        <a:rPr sz="800">
                           <a:latin typeface="Segoe UI"/>
                         </a:rPr>
                         <a:t/>
@@ -4906,7 +4906,7 @@
                           </a:solidFill>
                           <a:latin typeface="Segoe UI"/>
                         </a:rPr>
-                        <a:t>81</a:t>
+                        <a:t>80</a:t>
                       </a:r>
                     </a:p>
                   </a:txBody>
@@ -4943,7 +4943,7 @@
                         <a:rPr sz="800">
                           <a:latin typeface="Segoe UI"/>
                         </a:rPr>
-                        <a:t>55</a:t>
+                        <a:t>54</a:t>
                       </a:r>
                     </a:p>
                   </a:txBody>
@@ -4983,7 +4983,7 @@
                           </a:solidFill>
                           <a:latin typeface="Segoe UI"/>
                         </a:rPr>
-                        <a:t>47</a:t>
+                        <a:t>48</a:t>
                       </a:r>
                     </a:p>
                   </a:txBody>
@@ -5262,7 +5262,7 @@
                           </a:solidFill>
                           <a:latin typeface="Segoe UI"/>
                         </a:rPr>
-                        <a:t>$592.3K</a:t>
+                        <a:t>$604.6K</a:t>
                       </a:r>
                     </a:p>
                   </a:txBody>

--- a/generated/Tier 1 Broker Scorecards/United Advantage Insurance Services_Broker_Scorecard.pptx
+++ b/generated/Tier 1 Broker Scorecards/United Advantage Insurance Services_Broker_Scorecard.pptx
@@ -3357,7 +3357,7 @@
                         <a:rPr sz="800">
                           <a:latin typeface="Segoe UI"/>
                         </a:rPr>
-                        <a:t>$5,313,121.90 / $7,505,471.29 / $3,587,388.80</a:t>
+                        <a:t>$5,313,121.90 / $7,528,798.23 / $3,610,715.74</a:t>
                       </a:r>
                     </a:p>
                   </a:txBody>
@@ -3394,7 +3394,7 @@
                         <a:rPr sz="900">
                           <a:latin typeface="Segoe UI"/>
                         </a:rPr>
-                        <a:t>Tier 1  |  5.52% / 15.00%</a:t>
+                        <a:t>Tier 1  |  5.45% / 15.00%</a:t>
                       </a:r>
                     </a:p>
                   </a:txBody>
@@ -3431,7 +3431,7 @@
                         <a:rPr sz="900">
                           <a:latin typeface="Segoe UI"/>
                         </a:rPr>
-                        <a:t>$7,438,370.66  (48.2% achieved)</a:t>
+                        <a:t>$7,438,370.66  (48.5% achieved)</a:t>
                       </a:r>
                     </a:p>
                   </a:txBody>
@@ -3653,7 +3653,7 @@
                         <a:rPr sz="900">
                           <a:latin typeface="Segoe UI"/>
                         </a:rPr>
-                        <a:t>Fleet Subs: 138  |  Binds: 12</a:t>
+                        <a:t>Fleet Subs: 140  |  Binds: 12</a:t>
                       </a:r>
                     </a:p>
                   </a:txBody>
@@ -3690,7 +3690,7 @@
                         <a:rPr sz="900">
                           <a:latin typeface="Segoe UI"/>
                         </a:rPr>
-                        <a:t>Fleet Bound Premium: $937,429.33</a:t>
+                        <a:t>Fleet Bound Premium: $891,627.92</a:t>
                       </a:r>
                     </a:p>
                   </a:txBody>
@@ -3727,7 +3727,7 @@
                         <a:rPr sz="900">
                           <a:latin typeface="Segoe UI"/>
                         </a:rPr>
-                        <a:t>Fleet Book %: 26.1%</a:t>
+                        <a:t>Fleet Book %: 24.7%</a:t>
                       </a:r>
                     </a:p>
                   </a:txBody>
@@ -3766,7 +3766,7 @@
                         <a:rPr sz="900">
                           <a:latin typeface="Segoe UI"/>
                         </a:rPr>
-                        <a:t>Non-Fleet Subs: 2795  |  Binds: 150</a:t>
+                        <a:t>Non-Fleet Subs: 2834  |  Binds: 150</a:t>
                       </a:r>
                     </a:p>
                   </a:txBody>
@@ -3803,7 +3803,7 @@
                         <a:rPr sz="900">
                           <a:latin typeface="Segoe UI"/>
                         </a:rPr>
-                        <a:t>Non-Fleet Bound Premium: $2,649,959.47</a:t>
+                        <a:t>Non-Fleet Bound Premium: $2,719,087.82</a:t>
                       </a:r>
                     </a:p>
                   </a:txBody>
@@ -3840,7 +3840,7 @@
                         <a:rPr sz="900">
                           <a:latin typeface="Segoe UI"/>
                         </a:rPr>
-                        <a:t>Non-Fleet Book %: 73.9%</a:t>
+                        <a:t>Non-Fleet Book %: 75.3%</a:t>
                       </a:r>
                     </a:p>
                   </a:txBody>
@@ -4428,7 +4428,7 @@
                           </a:solidFill>
                           <a:latin typeface="Segoe UI"/>
                         </a:rPr>
-                        <a:t>473</a:t>
+                        <a:t>518</a:t>
                       </a:r>
                     </a:p>
                   </a:txBody>
@@ -4581,7 +4581,7 @@
                         <a:rPr sz="800">
                           <a:latin typeface="Segoe UI"/>
                         </a:rPr>
-                        <a:t>9.2%</a:t>
+                        <a:t>9.0%</a:t>
                       </a:r>
                     </a:p>
                   </a:txBody>
@@ -4707,7 +4707,7 @@
                           </a:solidFill>
                           <a:latin typeface="Segoe UI"/>
                         </a:rPr>
-                        <a:t>10.1%</a:t>
+                        <a:t>9.8%</a:t>
                       </a:r>
                     </a:p>
                   </a:txBody>
@@ -4747,7 +4747,7 @@
                         <a:rPr sz="800">
                           <a:latin typeface="Segoe UI"/>
                         </a:rPr>
-                        <a:t>13.3%</a:t>
+                        <a:t>13.0%</a:t>
                       </a:r>
                     </a:p>
                   </a:txBody>
@@ -4866,7 +4866,7 @@
                         <a:rPr sz="800">
                           <a:latin typeface="Segoe UI"/>
                         </a:rPr>
-                        <a:t>46</a:t>
+                        <a:t>45</a:t>
                       </a:r>
                     </a:p>
                   </a:txBody>
@@ -4983,7 +4983,7 @@
                           </a:solidFill>
                           <a:latin typeface="Segoe UI"/>
                         </a:rPr>
-                        <a:t>48</a:t>
+                        <a:t>51</a:t>
                       </a:r>
                     </a:p>
                   </a:txBody>
@@ -5020,7 +5020,7 @@
                         <a:rPr sz="800">
                           <a:latin typeface="Segoe UI"/>
                         </a:rPr>
-                        <a:t>51</a:t>
+                        <a:t>50</a:t>
                       </a:r>
                     </a:p>
                   </a:txBody>
@@ -5262,7 +5262,7 @@
                           </a:solidFill>
                           <a:latin typeface="Segoe UI"/>
                         </a:rPr>
-                        <a:t>$604.6K</a:t>
+                        <a:t>$627.9K</a:t>
                       </a:r>
                     </a:p>
                   </a:txBody>

--- a/generated/Tier 1 Broker Scorecards/United Advantage Insurance Services_Broker_Scorecard.pptx
+++ b/generated/Tier 1 Broker Scorecards/United Advantage Insurance Services_Broker_Scorecard.pptx
@@ -3357,7 +3357,7 @@
                         <a:rPr sz="800">
                           <a:latin typeface="Segoe UI"/>
                         </a:rPr>
-                        <a:t>$5,313,121.90 / $7,528,798.23 / $3,610,715.74</a:t>
+                        <a:t>$5,313,121.90 / $7,545,456.64 / $3,627,374.15</a:t>
                       </a:r>
                     </a:p>
                   </a:txBody>
@@ -3394,7 +3394,7 @@
                         <a:rPr sz="900">
                           <a:latin typeface="Segoe UI"/>
                         </a:rPr>
-                        <a:t>Tier 1  |  5.45% / 15.00%</a:t>
+                        <a:t>Tier 1  |  5.38% / 15.00%</a:t>
                       </a:r>
                     </a:p>
                   </a:txBody>
@@ -3431,7 +3431,7 @@
                         <a:rPr sz="900">
                           <a:latin typeface="Segoe UI"/>
                         </a:rPr>
-                        <a:t>$7,438,370.66  (48.5% achieved)</a:t>
+                        <a:t>$7,438,370.66  (48.8% achieved)</a:t>
                       </a:r>
                     </a:p>
                   </a:txBody>
@@ -3653,7 +3653,7 @@
                         <a:rPr sz="900">
                           <a:latin typeface="Segoe UI"/>
                         </a:rPr>
-                        <a:t>Fleet Subs: 140  |  Binds: 12</a:t>
+                        <a:t>Fleet Subs: 140  |  Binds: 10</a:t>
                       </a:r>
                     </a:p>
                   </a:txBody>
@@ -3690,7 +3690,7 @@
                         <a:rPr sz="900">
                           <a:latin typeface="Segoe UI"/>
                         </a:rPr>
-                        <a:t>Fleet Bound Premium: $891,627.92</a:t>
+                        <a:t>Fleet Bound Premium: $698,482.16</a:t>
                       </a:r>
                     </a:p>
                   </a:txBody>
@@ -3727,7 +3727,7 @@
                         <a:rPr sz="900">
                           <a:latin typeface="Segoe UI"/>
                         </a:rPr>
-                        <a:t>Fleet Book %: 24.7%</a:t>
+                        <a:t>Fleet Book %: 19.3%</a:t>
                       </a:r>
                     </a:p>
                   </a:txBody>
@@ -3766,7 +3766,7 @@
                         <a:rPr sz="900">
                           <a:latin typeface="Segoe UI"/>
                         </a:rPr>
-                        <a:t>Non-Fleet Subs: 2834  |  Binds: 150</a:t>
+                        <a:t>Non-Fleet Subs: 2854  |  Binds: 151</a:t>
                       </a:r>
                     </a:p>
                   </a:txBody>
@@ -3803,7 +3803,7 @@
                         <a:rPr sz="900">
                           <a:latin typeface="Segoe UI"/>
                         </a:rPr>
-                        <a:t>Non-Fleet Bound Premium: $2,719,087.82</a:t>
+                        <a:t>Non-Fleet Bound Premium: $2,928,891.99</a:t>
                       </a:r>
                     </a:p>
                   </a:txBody>
@@ -3840,7 +3840,7 @@
                         <a:rPr sz="900">
                           <a:latin typeface="Segoe UI"/>
                         </a:rPr>
-                        <a:t>Non-Fleet Book %: 75.3%</a:t>
+                        <a:t>Non-Fleet Book %: 80.7%</a:t>
                       </a:r>
                     </a:p>
                   </a:txBody>
@@ -4428,7 +4428,7 @@
                           </a:solidFill>
                           <a:latin typeface="Segoe UI"/>
                         </a:rPr>
-                        <a:t>518</a:t>
+                        <a:t>539</a:t>
                       </a:r>
                     </a:p>
                   </a:txBody>
@@ -4581,7 +4581,7 @@
                         <a:rPr sz="800">
                           <a:latin typeface="Segoe UI"/>
                         </a:rPr>
-                        <a:t>9.0%</a:t>
+                        <a:t>9.4%</a:t>
                       </a:r>
                     </a:p>
                   </a:txBody>
@@ -4624,7 +4624,7 @@
                           </a:solidFill>
                           <a:latin typeface="Segoe UI"/>
                         </a:rPr>
-                        <a:t>10.5%</a:t>
+                        <a:t>10.6%</a:t>
                       </a:r>
                     </a:p>
                   </a:txBody>
@@ -4707,7 +4707,7 @@
                           </a:solidFill>
                           <a:latin typeface="Segoe UI"/>
                         </a:rPr>
-                        <a:t>9.8%</a:t>
+                        <a:t>9.3%</a:t>
                       </a:r>
                     </a:p>
                   </a:txBody>
@@ -4747,7 +4747,7 @@
                         <a:rPr sz="800">
                           <a:latin typeface="Segoe UI"/>
                         </a:rPr>
-                        <a:t>13.0%</a:t>
+                        <a:t>13.3%</a:t>
                       </a:r>
                     </a:p>
                   </a:txBody>
@@ -4866,7 +4866,7 @@
                         <a:rPr sz="800">
                           <a:latin typeface="Segoe UI"/>
                         </a:rPr>
-                        <a:t>45</a:t>
+                        <a:t>47</a:t>
                       </a:r>
                     </a:p>
                   </a:txBody>
@@ -4906,7 +4906,7 @@
                           </a:solidFill>
                           <a:latin typeface="Segoe UI"/>
                         </a:rPr>
-                        <a:t>80</a:t>
+                        <a:t>81</a:t>
                       </a:r>
                     </a:p>
                   </a:txBody>
@@ -4983,7 +4983,7 @@
                           </a:solidFill>
                           <a:latin typeface="Segoe UI"/>
                         </a:rPr>
-                        <a:t>51</a:t>
+                        <a:t>50</a:t>
                       </a:r>
                     </a:p>
                   </a:txBody>
@@ -5020,7 +5020,7 @@
                         <a:rPr sz="800">
                           <a:latin typeface="Segoe UI"/>
                         </a:rPr>
-                        <a:t>50</a:t>
+                        <a:t>51</a:t>
                       </a:r>
                     </a:p>
                   </a:txBody>
@@ -5262,7 +5262,7 @@
                           </a:solidFill>
                           <a:latin typeface="Segoe UI"/>
                         </a:rPr>
-                        <a:t>$627.9K</a:t>
+                        <a:t>$644.5K</a:t>
                       </a:r>
                     </a:p>
                   </a:txBody>

--- a/generated/Tier 1 Broker Scorecards/United Advantage Insurance Services_Broker_Scorecard.pptx
+++ b/generated/Tier 1 Broker Scorecards/United Advantage Insurance Services_Broker_Scorecard.pptx
@@ -4581,7 +4581,7 @@
                         <a:rPr sz="800">
                           <a:latin typeface="Segoe UI"/>
                         </a:rPr>
-                        <a:t>9.4%</a:t>
+                        <a:t>9.2%</a:t>
                       </a:r>
                     </a:p>
                   </a:txBody>
@@ -4747,7 +4747,7 @@
                         <a:rPr sz="800">
                           <a:latin typeface="Segoe UI"/>
                         </a:rPr>
-                        <a:t>13.3%</a:t>
+                        <a:t>13.0%</a:t>
                       </a:r>
                     </a:p>
                   </a:txBody>
@@ -4866,7 +4866,7 @@
                         <a:rPr sz="800">
                           <a:latin typeface="Segoe UI"/>
                         </a:rPr>
-                        <a:t>47</a:t>
+                        <a:t>46</a:t>
                       </a:r>
                     </a:p>
                   </a:txBody>
@@ -5020,7 +5020,7 @@
                         <a:rPr sz="800">
                           <a:latin typeface="Segoe UI"/>
                         </a:rPr>
-                        <a:t>51</a:t>
+                        <a:t>50</a:t>
                       </a:r>
                     </a:p>
                   </a:txBody>

--- a/generated/Tier 1 Broker Scorecards/United Advantage Insurance Services_Broker_Scorecard.pptx
+++ b/generated/Tier 1 Broker Scorecards/United Advantage Insurance Services_Broker_Scorecard.pptx
@@ -3394,7 +3394,7 @@
                         <a:rPr sz="900">
                           <a:latin typeface="Segoe UI"/>
                         </a:rPr>
-                        <a:t>Tier 1  |  5.38% / 15.00%</a:t>
+                        <a:t>Tier 1  |  5.31% / 15.00%</a:t>
                       </a:r>
                     </a:p>
                   </a:txBody>
@@ -3690,7 +3690,7 @@
                         <a:rPr sz="900">
                           <a:latin typeface="Segoe UI"/>
                         </a:rPr>
-                        <a:t>Fleet Bound Premium: $698,482.16</a:t>
+                        <a:t>Fleet Bound Premium: $706,583.89</a:t>
                       </a:r>
                     </a:p>
                   </a:txBody>
@@ -3727,7 +3727,7 @@
                         <a:rPr sz="900">
                           <a:latin typeface="Segoe UI"/>
                         </a:rPr>
-                        <a:t>Fleet Book %: 19.3%</a:t>
+                        <a:t>Fleet Book %: 19.5%</a:t>
                       </a:r>
                     </a:p>
                   </a:txBody>
@@ -3766,7 +3766,7 @@
                         <a:rPr sz="900">
                           <a:latin typeface="Segoe UI"/>
                         </a:rPr>
-                        <a:t>Non-Fleet Subs: 2854  |  Binds: 151</a:t>
+                        <a:t>Non-Fleet Subs: 2855  |  Binds: 149</a:t>
                       </a:r>
                     </a:p>
                   </a:txBody>
@@ -3803,7 +3803,7 @@
                         <a:rPr sz="900">
                           <a:latin typeface="Segoe UI"/>
                         </a:rPr>
-                        <a:t>Non-Fleet Bound Premium: $2,928,891.99</a:t>
+                        <a:t>Non-Fleet Bound Premium: $2,920,790.26</a:t>
                       </a:r>
                     </a:p>
                   </a:txBody>
@@ -3840,7 +3840,7 @@
                         <a:rPr sz="900">
                           <a:latin typeface="Segoe UI"/>
                         </a:rPr>
-                        <a:t>Non-Fleet Book %: 80.7%</a:t>
+                        <a:t>Non-Fleet Book %: 80.5%</a:t>
                       </a:r>
                     </a:p>
                   </a:txBody>
@@ -4428,7 +4428,7 @@
                           </a:solidFill>
                           <a:latin typeface="Segoe UI"/>
                         </a:rPr>
-                        <a:t>539</a:t>
+                        <a:t>540</a:t>
                       </a:r>
                     </a:p>
                   </a:txBody>
@@ -4624,7 +4624,7 @@
                           </a:solidFill>
                           <a:latin typeface="Segoe UI"/>
                         </a:rPr>
-                        <a:t>10.6%</a:t>
+                        <a:t>10.5%</a:t>
                       </a:r>
                     </a:p>
                   </a:txBody>
@@ -4747,7 +4747,7 @@
                         <a:rPr sz="800">
                           <a:latin typeface="Segoe UI"/>
                         </a:rPr>
-                        <a:t>13.0%</a:t>
+                        <a:t>13.3%</a:t>
                       </a:r>
                     </a:p>
                   </a:txBody>
@@ -4906,7 +4906,7 @@
                           </a:solidFill>
                           <a:latin typeface="Segoe UI"/>
                         </a:rPr>
-                        <a:t>81</a:t>
+                        <a:t>80</a:t>
                       </a:r>
                     </a:p>
                   </a:txBody>
@@ -5020,7 +5020,7 @@
                         <a:rPr sz="800">
                           <a:latin typeface="Segoe UI"/>
                         </a:rPr>
-                        <a:t>50</a:t>
+                        <a:t>51</a:t>
                       </a:r>
                     </a:p>
                   </a:txBody>

--- a/generated/Tier 1 Broker Scorecards/United Advantage Insurance Services_Broker_Scorecard.pptx
+++ b/generated/Tier 1 Broker Scorecards/United Advantage Insurance Services_Broker_Scorecard.pptx
@@ -3394,7 +3394,7 @@
                         <a:rPr sz="900">
                           <a:latin typeface="Segoe UI"/>
                         </a:rPr>
-                        <a:t>Tier 1  |  5.31% / 15.00%</a:t>
+                        <a:t>Tier 1  |  5.27% / 15.00%</a:t>
                       </a:r>
                     </a:p>
                   </a:txBody>
@@ -3690,7 +3690,7 @@
                         <a:rPr sz="900">
                           <a:latin typeface="Segoe UI"/>
                         </a:rPr>
-                        <a:t>Fleet Bound Premium: $706,583.89</a:t>
+                        <a:t>Fleet Bound Premium: $711,137.25</a:t>
                       </a:r>
                     </a:p>
                   </a:txBody>
@@ -3727,7 +3727,7 @@
                         <a:rPr sz="900">
                           <a:latin typeface="Segoe UI"/>
                         </a:rPr>
-                        <a:t>Fleet Book %: 19.5%</a:t>
+                        <a:t>Fleet Book %: 19.6%</a:t>
                       </a:r>
                     </a:p>
                   </a:txBody>
@@ -3766,7 +3766,7 @@
                         <a:rPr sz="900">
                           <a:latin typeface="Segoe UI"/>
                         </a:rPr>
-                        <a:t>Non-Fleet Subs: 2855  |  Binds: 149</a:t>
+                        <a:t>Non-Fleet Subs: 2856  |  Binds: 148</a:t>
                       </a:r>
                     </a:p>
                   </a:txBody>
@@ -3803,7 +3803,7 @@
                         <a:rPr sz="900">
                           <a:latin typeface="Segoe UI"/>
                         </a:rPr>
-                        <a:t>Non-Fleet Bound Premium: $2,920,790.26</a:t>
+                        <a:t>Non-Fleet Bound Premium: $2,916,236.90</a:t>
                       </a:r>
                     </a:p>
                   </a:txBody>
@@ -3840,7 +3840,7 @@
                         <a:rPr sz="900">
                           <a:latin typeface="Segoe UI"/>
                         </a:rPr>
-                        <a:t>Non-Fleet Book %: 80.5%</a:t>
+                        <a:t>Non-Fleet Book %: 80.4%</a:t>
                       </a:r>
                     </a:p>
                   </a:txBody>
@@ -4428,7 +4428,7 @@
                           </a:solidFill>
                           <a:latin typeface="Segoe UI"/>
                         </a:rPr>
-                        <a:t>540</a:t>
+                        <a:t>541</a:t>
                       </a:r>
                     </a:p>
                   </a:txBody>
@@ -4581,7 +4581,7 @@
                         <a:rPr sz="800">
                           <a:latin typeface="Segoe UI"/>
                         </a:rPr>
-                        <a:t>9.2%</a:t>
+                        <a:t>9.0%</a:t>
                       </a:r>
                     </a:p>
                   </a:txBody>
@@ -4664,7 +4664,7 @@
                         <a:rPr sz="800">
                           <a:latin typeface="Segoe UI"/>
                         </a:rPr>
-                        <a:t>13.0%</a:t>
+                        <a:t>13.3%</a:t>
                       </a:r>
                     </a:p>
                   </a:txBody>
@@ -4707,7 +4707,7 @@
                           </a:solidFill>
                           <a:latin typeface="Segoe UI"/>
                         </a:rPr>
-                        <a:t>9.3%</a:t>
+                        <a:t>9.1%</a:t>
                       </a:r>
                     </a:p>
                   </a:txBody>
@@ -4747,7 +4747,7 @@
                         <a:rPr sz="800">
                           <a:latin typeface="Segoe UI"/>
                         </a:rPr>
-                        <a:t>13.3%</a:t>
+                        <a:t>12.8%</a:t>
                       </a:r>
                     </a:p>
                   </a:txBody>
@@ -4866,7 +4866,7 @@
                         <a:rPr sz="800">
                           <a:latin typeface="Segoe UI"/>
                         </a:rPr>
-                        <a:t>46</a:t>
+                        <a:t>45</a:t>
                       </a:r>
                     </a:p>
                   </a:txBody>
@@ -4943,7 +4943,7 @@
                         <a:rPr sz="800">
                           <a:latin typeface="Segoe UI"/>
                         </a:rPr>
-                        <a:t>54</a:t>
+                        <a:t>55</a:t>
                       </a:r>
                     </a:p>
                   </a:txBody>
@@ -4983,7 +4983,7 @@
                           </a:solidFill>
                           <a:latin typeface="Segoe UI"/>
                         </a:rPr>
-                        <a:t>50</a:t>
+                        <a:t>49</a:t>
                       </a:r>
                     </a:p>
                   </a:txBody>
@@ -5020,7 +5020,7 @@
                         <a:rPr sz="800">
                           <a:latin typeface="Segoe UI"/>
                         </a:rPr>
-                        <a:t>51</a:t>
+                        <a:t>49</a:t>
                       </a:r>
                     </a:p>
                   </a:txBody>

--- a/generated/Tier 1 Broker Scorecards/United Advantage Insurance Services_Broker_Scorecard.pptx
+++ b/generated/Tier 1 Broker Scorecards/United Advantage Insurance Services_Broker_Scorecard.pptx
@@ -3357,7 +3357,7 @@
                         <a:rPr sz="800">
                           <a:latin typeface="Segoe UI"/>
                         </a:rPr>
-                        <a:t>$5,313,121.90 / $7,545,456.64 / $3,627,374.15</a:t>
+                        <a:t>$5,313,121.90 / $7,564,199.58 / $3,646,117.09</a:t>
                       </a:r>
                     </a:p>
                   </a:txBody>
@@ -3394,7 +3394,7 @@
                         <a:rPr sz="900">
                           <a:latin typeface="Segoe UI"/>
                         </a:rPr>
-                        <a:t>Tier 1  |  5.27% / 15.00%</a:t>
+                        <a:t>Tier 1  |  5.20% / 15.00%</a:t>
                       </a:r>
                     </a:p>
                   </a:txBody>
@@ -3431,7 +3431,7 @@
                         <a:rPr sz="900">
                           <a:latin typeface="Segoe UI"/>
                         </a:rPr>
-                        <a:t>$7,438,370.66  (48.8% achieved)</a:t>
+                        <a:t>$7,438,370.66  (49.0% achieved)</a:t>
                       </a:r>
                     </a:p>
                   </a:txBody>
@@ -3690,7 +3690,7 @@
                         <a:rPr sz="900">
                           <a:latin typeface="Segoe UI"/>
                         </a:rPr>
-                        <a:t>Fleet Bound Premium: $711,137.25</a:t>
+                        <a:t>Fleet Bound Premium: $717,094.82</a:t>
                       </a:r>
                     </a:p>
                   </a:txBody>
@@ -3727,7 +3727,7 @@
                         <a:rPr sz="900">
                           <a:latin typeface="Segoe UI"/>
                         </a:rPr>
-                        <a:t>Fleet Book %: 19.6%</a:t>
+                        <a:t>Fleet Book %: 19.7%</a:t>
                       </a:r>
                     </a:p>
                   </a:txBody>
@@ -3766,7 +3766,7 @@
                         <a:rPr sz="900">
                           <a:latin typeface="Segoe UI"/>
                         </a:rPr>
-                        <a:t>Non-Fleet Subs: 2856  |  Binds: 148</a:t>
+                        <a:t>Non-Fleet Subs: 2861  |  Binds: 146</a:t>
                       </a:r>
                     </a:p>
                   </a:txBody>
@@ -3803,7 +3803,7 @@
                         <a:rPr sz="900">
                           <a:latin typeface="Segoe UI"/>
                         </a:rPr>
-                        <a:t>Non-Fleet Bound Premium: $2,916,236.90</a:t>
+                        <a:t>Non-Fleet Bound Premium: $2,929,022.27</a:t>
                       </a:r>
                     </a:p>
                   </a:txBody>
@@ -3840,7 +3840,7 @@
                         <a:rPr sz="900">
                           <a:latin typeface="Segoe UI"/>
                         </a:rPr>
-                        <a:t>Non-Fleet Book %: 80.4%</a:t>
+                        <a:t>Non-Fleet Book %: 80.3%</a:t>
                       </a:r>
                     </a:p>
                   </a:txBody>
@@ -4351,7 +4351,7 @@
                           </a:solidFill>
                           <a:latin typeface="Segoe UI"/>
                         </a:rPr>
-                        <a:t>763</a:t>
+                        <a:t>762</a:t>
                       </a:r>
                     </a:p>
                   </a:txBody>
@@ -4428,7 +4428,7 @@
                           </a:solidFill>
                           <a:latin typeface="Segoe UI"/>
                         </a:rPr>
-                        <a:t>541</a:t>
+                        <a:t>550</a:t>
                       </a:r>
                     </a:p>
                   </a:txBody>
@@ -4581,7 +4581,7 @@
                         <a:rPr sz="800">
                           <a:latin typeface="Segoe UI"/>
                         </a:rPr>
-                        <a:t>9.0%</a:t>
+                        <a:t>9.4%</a:t>
                       </a:r>
                     </a:p>
                   </a:txBody>
@@ -4707,7 +4707,7 @@
                           </a:solidFill>
                           <a:latin typeface="Segoe UI"/>
                         </a:rPr>
-                        <a:t>9.1%</a:t>
+                        <a:t>8.7%</a:t>
                       </a:r>
                     </a:p>
                   </a:txBody>
@@ -4747,7 +4747,7 @@
                         <a:rPr sz="800">
                           <a:latin typeface="Segoe UI"/>
                         </a:rPr>
-                        <a:t>12.8%</a:t>
+                        <a:t>13.3%</a:t>
                       </a:r>
                     </a:p>
                   </a:txBody>
@@ -4866,7 +4866,7 @@
                         <a:rPr sz="800">
                           <a:latin typeface="Segoe UI"/>
                         </a:rPr>
-                        <a:t>45</a:t>
+                        <a:t>47</a:t>
                       </a:r>
                     </a:p>
                   </a:txBody>
@@ -4983,7 +4983,7 @@
                           </a:solidFill>
                           <a:latin typeface="Segoe UI"/>
                         </a:rPr>
-                        <a:t>49</a:t>
+                        <a:t>48</a:t>
                       </a:r>
                     </a:p>
                   </a:txBody>
@@ -5020,7 +5020,7 @@
                         <a:rPr sz="800">
                           <a:latin typeface="Segoe UI"/>
                         </a:rPr>
-                        <a:t>49</a:t>
+                        <a:t>51</a:t>
                       </a:r>
                     </a:p>
                   </a:txBody>
@@ -5262,7 +5262,7 @@
                           </a:solidFill>
                           <a:latin typeface="Segoe UI"/>
                         </a:rPr>
-                        <a:t>$644.5K</a:t>
+                        <a:t>$663.3K</a:t>
                       </a:r>
                     </a:p>
                   </a:txBody>

--- a/generated/Tier 1 Broker Scorecards/United Advantage Insurance Services_Broker_Scorecard.pptx
+++ b/generated/Tier 1 Broker Scorecards/United Advantage Insurance Services_Broker_Scorecard.pptx
@@ -3357,7 +3357,7 @@
                         <a:rPr sz="800">
                           <a:latin typeface="Segoe UI"/>
                         </a:rPr>
-                        <a:t>$5,313,121.90 / $7,564,199.58 / $3,646,117.09</a:t>
+                        <a:t>$5,313,121.90 / $7,565,669.97 / $3,647,587.48</a:t>
                       </a:r>
                     </a:p>
                   </a:txBody>
@@ -3394,7 +3394,7 @@
                         <a:rPr sz="900">
                           <a:latin typeface="Segoe UI"/>
                         </a:rPr>
-                        <a:t>Tier 1  |  5.20% / 15.00%</a:t>
+                        <a:t>Tier 1  |  5.26% / 15.00%</a:t>
                       </a:r>
                     </a:p>
                   </a:txBody>
@@ -3653,7 +3653,7 @@
                         <a:rPr sz="900">
                           <a:latin typeface="Segoe UI"/>
                         </a:rPr>
-                        <a:t>Fleet Subs: 140  |  Binds: 10</a:t>
+                        <a:t>Fleet Subs: 140  |  Binds: 12</a:t>
                       </a:r>
                     </a:p>
                   </a:txBody>
@@ -3690,7 +3690,7 @@
                         <a:rPr sz="900">
                           <a:latin typeface="Segoe UI"/>
                         </a:rPr>
-                        <a:t>Fleet Bound Premium: $717,094.82</a:t>
+                        <a:t>Fleet Bound Premium: $891,270.58</a:t>
                       </a:r>
                     </a:p>
                   </a:txBody>
@@ -3727,7 +3727,7 @@
                         <a:rPr sz="900">
                           <a:latin typeface="Segoe UI"/>
                         </a:rPr>
-                        <a:t>Fleet Book %: 19.7%</a:t>
+                        <a:t>Fleet Book %: 24.4%</a:t>
                       </a:r>
                     </a:p>
                   </a:txBody>
@@ -3766,7 +3766,7 @@
                         <a:rPr sz="900">
                           <a:latin typeface="Segoe UI"/>
                         </a:rPr>
-                        <a:t>Non-Fleet Subs: 2861  |  Binds: 146</a:t>
+                        <a:t>Non-Fleet Subs: 2863  |  Binds: 146</a:t>
                       </a:r>
                     </a:p>
                   </a:txBody>
@@ -3803,7 +3803,7 @@
                         <a:rPr sz="900">
                           <a:latin typeface="Segoe UI"/>
                         </a:rPr>
-                        <a:t>Non-Fleet Bound Premium: $2,929,022.27</a:t>
+                        <a:t>Non-Fleet Bound Premium: $2,756,316.90</a:t>
                       </a:r>
                     </a:p>
                   </a:txBody>
@@ -3840,7 +3840,7 @@
                         <a:rPr sz="900">
                           <a:latin typeface="Segoe UI"/>
                         </a:rPr>
-                        <a:t>Non-Fleet Book %: 80.3%</a:t>
+                        <a:t>Non-Fleet Book %: 75.6%</a:t>
                       </a:r>
                     </a:p>
                   </a:txBody>
@@ -4428,7 +4428,7 @@
                           </a:solidFill>
                           <a:latin typeface="Segoe UI"/>
                         </a:rPr>
-                        <a:t>550</a:t>
+                        <a:t>553</a:t>
                       </a:r>
                     </a:p>
                   </a:txBody>
@@ -4707,7 +4707,7 @@
                           </a:solidFill>
                           <a:latin typeface="Segoe UI"/>
                         </a:rPr>
-                        <a:t>8.7%</a:t>
+                        <a:t>9.0%</a:t>
                       </a:r>
                     </a:p>
                   </a:txBody>
@@ -4747,7 +4747,7 @@
                         <a:rPr sz="800">
                           <a:latin typeface="Segoe UI"/>
                         </a:rPr>
-                        <a:t>13.3%</a:t>
+                        <a:t>13.0%</a:t>
                       </a:r>
                     </a:p>
                   </a:txBody>
@@ -4983,7 +4983,7 @@
                           </a:solidFill>
                           <a:latin typeface="Segoe UI"/>
                         </a:rPr>
-                        <a:t>48</a:t>
+                        <a:t>50</a:t>
                       </a:r>
                     </a:p>
                   </a:txBody>
@@ -5020,7 +5020,7 @@
                         <a:rPr sz="800">
                           <a:latin typeface="Segoe UI"/>
                         </a:rPr>
-                        <a:t>51</a:t>
+                        <a:t>50</a:t>
                       </a:r>
                     </a:p>
                   </a:txBody>
@@ -5262,7 +5262,7 @@
                           </a:solidFill>
                           <a:latin typeface="Segoe UI"/>
                         </a:rPr>
-                        <a:t>$663.3K</a:t>
+                        <a:t>$664.8K</a:t>
                       </a:r>
                     </a:p>
                   </a:txBody>

--- a/generated/Tier 1 Broker Scorecards/United Advantage Insurance Services_Broker_Scorecard.pptx
+++ b/generated/Tier 1 Broker Scorecards/United Advantage Insurance Services_Broker_Scorecard.pptx
@@ -3357,7 +3357,7 @@
                         <a:rPr sz="800">
                           <a:latin typeface="Segoe UI"/>
                         </a:rPr>
-                        <a:t>$5,313,121.90 / $7,565,669.97 / $3,647,587.48</a:t>
+                        <a:t>$5,313,121.90 / $7,655,437.40 / $3,737,354.91</a:t>
                       </a:r>
                     </a:p>
                   </a:txBody>
@@ -3394,7 +3394,7 @@
                         <a:rPr sz="900">
                           <a:latin typeface="Segoe UI"/>
                         </a:rPr>
-                        <a:t>Tier 1  |  5.26% / 15.00%</a:t>
+                        <a:t>Tier 1  |  5.64% / 15.00%</a:t>
                       </a:r>
                     </a:p>
                   </a:txBody>
@@ -3431,7 +3431,7 @@
                         <a:rPr sz="900">
                           <a:latin typeface="Segoe UI"/>
                         </a:rPr>
-                        <a:t>$7,438,370.66  (49.0% achieved)</a:t>
+                        <a:t>$7,438,370.66  (50.2% achieved)</a:t>
                       </a:r>
                     </a:p>
                   </a:txBody>
@@ -3653,7 +3653,7 @@
                         <a:rPr sz="900">
                           <a:latin typeface="Segoe UI"/>
                         </a:rPr>
-                        <a:t>Fleet Subs: 140  |  Binds: 12</a:t>
+                        <a:t>Fleet Subs: 139  |  Binds: 14</a:t>
                       </a:r>
                     </a:p>
                   </a:txBody>
@@ -3690,7 +3690,7 @@
                         <a:rPr sz="900">
                           <a:latin typeface="Segoe UI"/>
                         </a:rPr>
-                        <a:t>Fleet Bound Premium: $891,270.58</a:t>
+                        <a:t>Fleet Bound Premium: $919,307.19</a:t>
                       </a:r>
                     </a:p>
                   </a:txBody>
@@ -3727,7 +3727,7 @@
                         <a:rPr sz="900">
                           <a:latin typeface="Segoe UI"/>
                         </a:rPr>
-                        <a:t>Fleet Book %: 24.4%</a:t>
+                        <a:t>Fleet Book %: 24.6%</a:t>
                       </a:r>
                     </a:p>
                   </a:txBody>
@@ -3766,7 +3766,7 @@
                         <a:rPr sz="900">
                           <a:latin typeface="Segoe UI"/>
                         </a:rPr>
-                        <a:t>Non-Fleet Subs: 2863  |  Binds: 146</a:t>
+                        <a:t>Non-Fleet Subs: 2874  |  Binds: 156</a:t>
                       </a:r>
                     </a:p>
                   </a:txBody>
@@ -3803,7 +3803,7 @@
                         <a:rPr sz="900">
                           <a:latin typeface="Segoe UI"/>
                         </a:rPr>
-                        <a:t>Non-Fleet Bound Premium: $2,756,316.90</a:t>
+                        <a:t>Non-Fleet Bound Premium: $2,818,047.72</a:t>
                       </a:r>
                     </a:p>
                   </a:txBody>
@@ -3840,7 +3840,7 @@
                         <a:rPr sz="900">
                           <a:latin typeface="Segoe UI"/>
                         </a:rPr>
-                        <a:t>Non-Fleet Book %: 75.6%</a:t>
+                        <a:t>Non-Fleet Book %: 75.4%</a:t>
                       </a:r>
                     </a:p>
                   </a:txBody>
@@ -4428,7 +4428,7 @@
                           </a:solidFill>
                           <a:latin typeface="Segoe UI"/>
                         </a:rPr>
-                        <a:t>553</a:t>
+                        <a:t>568</a:t>
                       </a:r>
                     </a:p>
                   </a:txBody>
@@ -4581,7 +4581,7 @@
                         <a:rPr sz="800">
                           <a:latin typeface="Segoe UI"/>
                         </a:rPr>
-                        <a:t>9.4%</a:t>
+                        <a:t>9.0%</a:t>
                       </a:r>
                     </a:p>
                   </a:txBody>
@@ -4624,7 +4624,90 @@
                           </a:solidFill>
                           <a:latin typeface="Segoe UI"/>
                         </a:rPr>
-                        <a:t>10.5%</a:t>
+                        <a:t>10.6%</a:t>
+                      </a:r>
+                    </a:p>
+                  </a:txBody>
+                  <a:tcPr marL="114300" marR="91425" marT="45700" marB="45700">
+                    <a:solidFill>
+                      <a:srgbClr val="F5F3FF"/>
+                    </a:solidFill>
+                    <a:lnL w="6350" cap="flat" cmpd="sng">
+                      <a:solidFill>
+                        <a:srgbClr val="E5E7EB"/>
+                      </a:solidFill>
+                    </a:lnL>
+                    <a:lnR w="6350" cap="flat" cmpd="sng">
+                      <a:solidFill>
+                        <a:srgbClr val="E5E7EB"/>
+                      </a:solidFill>
+                    </a:lnR>
+                    <a:lnT w="6350" cap="flat" cmpd="sng">
+                      <a:solidFill>
+                        <a:srgbClr val="E5E7EB"/>
+                      </a:solidFill>
+                    </a:lnT>
+                    <a:lnB w="6350" cap="flat" cmpd="sng">
+                      <a:solidFill>
+                        <a:srgbClr val="E5E7EB"/>
+                      </a:solidFill>
+                    </a:lnB>
+                  </a:tcPr>
+                </a:tc>
+                <a:tc>
+                  <a:txBody>
+                    <a:bodyPr/>
+                    <a:lstStyle/>
+                    <a:p>
+                      <a:pPr algn="ctr"/>
+                      <a:r>
+                        <a:rPr sz="800">
+                          <a:latin typeface="Segoe UI"/>
+                        </a:rPr>
+                        <a:t>13.0%</a:t>
+                      </a:r>
+                    </a:p>
+                  </a:txBody>
+                  <a:tcPr marL="114300" marR="91425" marT="45700" marB="45700">
+                    <a:solidFill>
+                      <a:srgbClr val="F5F3FF"/>
+                    </a:solidFill>
+                    <a:lnL w="6350" cap="flat" cmpd="sng">
+                      <a:solidFill>
+                        <a:srgbClr val="E5E7EB"/>
+                      </a:solidFill>
+                    </a:lnL>
+                    <a:lnR w="6350" cap="flat" cmpd="sng">
+                      <a:solidFill>
+                        <a:srgbClr val="E5E7EB"/>
+                      </a:solidFill>
+                    </a:lnR>
+                    <a:lnT w="6350" cap="flat" cmpd="sng">
+                      <a:solidFill>
+                        <a:srgbClr val="E5E7EB"/>
+                      </a:solidFill>
+                    </a:lnT>
+                    <a:lnB w="6350" cap="flat" cmpd="sng">
+                      <a:solidFill>
+                        <a:srgbClr val="E5E7EB"/>
+                      </a:solidFill>
+                    </a:lnB>
+                  </a:tcPr>
+                </a:tc>
+                <a:tc>
+                  <a:txBody>
+                    <a:bodyPr/>
+                    <a:lstStyle/>
+                    <a:p>
+                      <a:pPr algn="ctr"/>
+                      <a:r>
+                        <a:rPr sz="800">
+                          <a:solidFill>
+                            <a:srgbClr val="DC2626"/>
+                          </a:solidFill>
+                          <a:latin typeface="Segoe UI"/>
+                        </a:rPr>
+                        <a:t>10.6%</a:t>
                       </a:r>
                     </a:p>
                   </a:txBody>
@@ -4702,89 +4785,6 @@
                       <a:pPr algn="ctr"/>
                       <a:r>
                         <a:rPr sz="800">
-                          <a:solidFill>
-                            <a:srgbClr val="DC2626"/>
-                          </a:solidFill>
-                          <a:latin typeface="Segoe UI"/>
-                        </a:rPr>
-                        <a:t>9.0%</a:t>
-                      </a:r>
-                    </a:p>
-                  </a:txBody>
-                  <a:tcPr marL="114300" marR="91425" marT="45700" marB="45700">
-                    <a:solidFill>
-                      <a:srgbClr val="F5F3FF"/>
-                    </a:solidFill>
-                    <a:lnL w="6350" cap="flat" cmpd="sng">
-                      <a:solidFill>
-                        <a:srgbClr val="E5E7EB"/>
-                      </a:solidFill>
-                    </a:lnL>
-                    <a:lnR w="6350" cap="flat" cmpd="sng">
-                      <a:solidFill>
-                        <a:srgbClr val="E5E7EB"/>
-                      </a:solidFill>
-                    </a:lnR>
-                    <a:lnT w="6350" cap="flat" cmpd="sng">
-                      <a:solidFill>
-                        <a:srgbClr val="E5E7EB"/>
-                      </a:solidFill>
-                    </a:lnT>
-                    <a:lnB w="6350" cap="flat" cmpd="sng">
-                      <a:solidFill>
-                        <a:srgbClr val="E5E7EB"/>
-                      </a:solidFill>
-                    </a:lnB>
-                  </a:tcPr>
-                </a:tc>
-                <a:tc>
-                  <a:txBody>
-                    <a:bodyPr/>
-                    <a:lstStyle/>
-                    <a:p>
-                      <a:pPr algn="ctr"/>
-                      <a:r>
-                        <a:rPr sz="800">
-                          <a:latin typeface="Segoe UI"/>
-                        </a:rPr>
-                        <a:t>13.0%</a:t>
-                      </a:r>
-                    </a:p>
-                  </a:txBody>
-                  <a:tcPr marL="114300" marR="91425" marT="45700" marB="45700">
-                    <a:solidFill>
-                      <a:srgbClr val="F5F3FF"/>
-                    </a:solidFill>
-                    <a:lnL w="6350" cap="flat" cmpd="sng">
-                      <a:solidFill>
-                        <a:srgbClr val="E5E7EB"/>
-                      </a:solidFill>
-                    </a:lnL>
-                    <a:lnR w="6350" cap="flat" cmpd="sng">
-                      <a:solidFill>
-                        <a:srgbClr val="E5E7EB"/>
-                      </a:solidFill>
-                    </a:lnR>
-                    <a:lnT w="6350" cap="flat" cmpd="sng">
-                      <a:solidFill>
-                        <a:srgbClr val="E5E7EB"/>
-                      </a:solidFill>
-                    </a:lnT>
-                    <a:lnB w="6350" cap="flat" cmpd="sng">
-                      <a:solidFill>
-                        <a:srgbClr val="E5E7EB"/>
-                      </a:solidFill>
-                    </a:lnB>
-                  </a:tcPr>
-                </a:tc>
-                <a:tc>
-                  <a:txBody>
-                    <a:bodyPr/>
-                    <a:lstStyle/>
-                    <a:p>
-                      <a:pPr algn="ctr"/>
-                      <a:r>
-                        <a:rPr sz="800">
                           <a:latin typeface="Segoe UI"/>
                         </a:rPr>
                         <a:t/>
@@ -4866,7 +4866,7 @@
                         <a:rPr sz="800">
                           <a:latin typeface="Segoe UI"/>
                         </a:rPr>
-                        <a:t>47</a:t>
+                        <a:t>45</a:t>
                       </a:r>
                     </a:p>
                   </a:txBody>
@@ -4906,7 +4906,7 @@
                           </a:solidFill>
                           <a:latin typeface="Segoe UI"/>
                         </a:rPr>
-                        <a:t>80</a:t>
+                        <a:t>81</a:t>
                       </a:r>
                     </a:p>
                   </a:txBody>
@@ -4943,7 +4943,7 @@
                         <a:rPr sz="800">
                           <a:latin typeface="Segoe UI"/>
                         </a:rPr>
-                        <a:t>55</a:t>
+                        <a:t>54</a:t>
                       </a:r>
                     </a:p>
                   </a:txBody>
@@ -4979,11 +4979,11 @@
                       <a:r>
                         <a:rPr sz="800">
                           <a:solidFill>
-                            <a:srgbClr val="DC2626"/>
+                            <a:srgbClr val="059669"/>
                           </a:solidFill>
                           <a:latin typeface="Segoe UI"/>
                         </a:rPr>
-                        <a:t>50</a:t>
+                        <a:t>60</a:t>
                       </a:r>
                     </a:p>
                   </a:txBody>
@@ -5020,7 +5020,7 @@
                         <a:rPr sz="800">
                           <a:latin typeface="Segoe UI"/>
                         </a:rPr>
-                        <a:t>50</a:t>
+                        <a:t>51</a:t>
                       </a:r>
                     </a:p>
                   </a:txBody>
@@ -5262,7 +5262,7 @@
                           </a:solidFill>
                           <a:latin typeface="Segoe UI"/>
                         </a:rPr>
-                        <a:t>$664.8K</a:t>
+                        <a:t>$754.5K</a:t>
                       </a:r>
                     </a:p>
                   </a:txBody>

--- a/generated/Tier 1 Broker Scorecards/United Advantage Insurance Services_Broker_Scorecard.pptx
+++ b/generated/Tier 1 Broker Scorecards/United Advantage Insurance Services_Broker_Scorecard.pptx
@@ -3357,7 +3357,7 @@
                         <a:rPr sz="800">
                           <a:latin typeface="Segoe UI"/>
                         </a:rPr>
-                        <a:t>$5,313,121.90 / $7,655,437.40 / $3,737,354.91</a:t>
+                        <a:t>$5,313,121.90 / $7,671,676.88 / $3,753,594.39</a:t>
                       </a:r>
                     </a:p>
                   </a:txBody>
@@ -3394,7 +3394,7 @@
                         <a:rPr sz="900">
                           <a:latin typeface="Segoe UI"/>
                         </a:rPr>
-                        <a:t>Tier 1  |  5.64% / 15.00%</a:t>
+                        <a:t>Tier 1  |  5.57% / 15.00%</a:t>
                       </a:r>
                     </a:p>
                   </a:txBody>
@@ -3431,7 +3431,7 @@
                         <a:rPr sz="900">
                           <a:latin typeface="Segoe UI"/>
                         </a:rPr>
-                        <a:t>$7,438,370.66  (50.2% achieved)</a:t>
+                        <a:t>$7,438,370.66  (50.5% achieved)</a:t>
                       </a:r>
                     </a:p>
                   </a:txBody>
@@ -3653,7 +3653,7 @@
                         <a:rPr sz="900">
                           <a:latin typeface="Segoe UI"/>
                         </a:rPr>
-                        <a:t>Fleet Subs: 139  |  Binds: 14</a:t>
+                        <a:t>Fleet Subs: 139  |  Binds: 12</a:t>
                       </a:r>
                     </a:p>
                   </a:txBody>
@@ -3690,7 +3690,7 @@
                         <a:rPr sz="900">
                           <a:latin typeface="Segoe UI"/>
                         </a:rPr>
-                        <a:t>Fleet Bound Premium: $919,307.19</a:t>
+                        <a:t>Fleet Bound Premium: $850,036.87</a:t>
                       </a:r>
                     </a:p>
                   </a:txBody>
@@ -3727,7 +3727,7 @@
                         <a:rPr sz="900">
                           <a:latin typeface="Segoe UI"/>
                         </a:rPr>
-                        <a:t>Fleet Book %: 24.6%</a:t>
+                        <a:t>Fleet Book %: 22.6%</a:t>
                       </a:r>
                     </a:p>
                   </a:txBody>
@@ -3766,7 +3766,7 @@
                         <a:rPr sz="900">
                           <a:latin typeface="Segoe UI"/>
                         </a:rPr>
-                        <a:t>Non-Fleet Subs: 2874  |  Binds: 156</a:t>
+                        <a:t>Non-Fleet Subs: 2893  |  Binds: 157</a:t>
                       </a:r>
                     </a:p>
                   </a:txBody>
@@ -3803,7 +3803,7 @@
                         <a:rPr sz="900">
                           <a:latin typeface="Segoe UI"/>
                         </a:rPr>
-                        <a:t>Non-Fleet Bound Premium: $2,818,047.72</a:t>
+                        <a:t>Non-Fleet Bound Premium: $2,903,557.52</a:t>
                       </a:r>
                     </a:p>
                   </a:txBody>
@@ -3840,7 +3840,7 @@
                         <a:rPr sz="900">
                           <a:latin typeface="Segoe UI"/>
                         </a:rPr>
-                        <a:t>Non-Fleet Book %: 75.4%</a:t>
+                        <a:t>Non-Fleet Book %: 77.4%</a:t>
                       </a:r>
                     </a:p>
                   </a:txBody>
@@ -4428,7 +4428,7 @@
                           </a:solidFill>
                           <a:latin typeface="Segoe UI"/>
                         </a:rPr>
-                        <a:t>568</a:t>
+                        <a:t>591</a:t>
                       </a:r>
                     </a:p>
                   </a:txBody>
@@ -4581,7 +4581,7 @@
                         <a:rPr sz="800">
                           <a:latin typeface="Segoe UI"/>
                         </a:rPr>
-                        <a:t>9.0%</a:t>
+                        <a:t>9.2%</a:t>
                       </a:r>
                     </a:p>
                   </a:txBody>
@@ -4624,7 +4624,7 @@
                           </a:solidFill>
                           <a:latin typeface="Segoe UI"/>
                         </a:rPr>
-                        <a:t>10.6%</a:t>
+                        <a:t>10.5%</a:t>
                       </a:r>
                     </a:p>
                   </a:txBody>
@@ -4707,7 +4707,7 @@
                           </a:solidFill>
                           <a:latin typeface="Segoe UI"/>
                         </a:rPr>
-                        <a:t>10.6%</a:t>
+                        <a:t>10.5%</a:t>
                       </a:r>
                     </a:p>
                   </a:txBody>
@@ -4747,7 +4747,7 @@
                         <a:rPr sz="800">
                           <a:latin typeface="Segoe UI"/>
                         </a:rPr>
-                        <a:t>13.3%</a:t>
+                        <a:t>13.0%</a:t>
                       </a:r>
                     </a:p>
                   </a:txBody>
@@ -4866,7 +4866,7 @@
                         <a:rPr sz="800">
                           <a:latin typeface="Segoe UI"/>
                         </a:rPr>
-                        <a:t>45</a:t>
+                        <a:t>46</a:t>
                       </a:r>
                     </a:p>
                   </a:txBody>
@@ -4906,7 +4906,7 @@
                           </a:solidFill>
                           <a:latin typeface="Segoe UI"/>
                         </a:rPr>
-                        <a:t>81</a:t>
+                        <a:t>80</a:t>
                       </a:r>
                     </a:p>
                   </a:txBody>
@@ -4983,7 +4983,7 @@
                           </a:solidFill>
                           <a:latin typeface="Segoe UI"/>
                         </a:rPr>
-                        <a:t>60</a:t>
+                        <a:t>62</a:t>
                       </a:r>
                     </a:p>
                   </a:txBody>
@@ -5020,7 +5020,7 @@
                         <a:rPr sz="800">
                           <a:latin typeface="Segoe UI"/>
                         </a:rPr>
-                        <a:t>51</a:t>
+                        <a:t>50</a:t>
                       </a:r>
                     </a:p>
                   </a:txBody>
@@ -5262,7 +5262,7 @@
                           </a:solidFill>
                           <a:latin typeface="Segoe UI"/>
                         </a:rPr>
-                        <a:t>$754.5K</a:t>
+                        <a:t>$770.8K</a:t>
                       </a:r>
                     </a:p>
                   </a:txBody>

--- a/generated/Tier 1 Broker Scorecards/United Advantage Insurance Services_Broker_Scorecard.pptx
+++ b/generated/Tier 1 Broker Scorecards/United Advantage Insurance Services_Broker_Scorecard.pptx
@@ -3357,7 +3357,7 @@
                         <a:rPr sz="800">
                           <a:latin typeface="Segoe UI"/>
                         </a:rPr>
-                        <a:t>$5,313,121.90 / $7,671,676.88 / $3,753,594.39</a:t>
+                        <a:t>$5,313,121.90 / $7,672,226.88 / $3,754,144.39</a:t>
                       </a:r>
                     </a:p>
                   </a:txBody>
@@ -3394,7 +3394,7 @@
                         <a:rPr sz="900">
                           <a:latin typeface="Segoe UI"/>
                         </a:rPr>
-                        <a:t>Tier 1  |  5.57% / 15.00%</a:t>
+                        <a:t>Tier 1  |  5.61% / 15.00%</a:t>
                       </a:r>
                     </a:p>
                   </a:txBody>
@@ -3690,7 +3690,7 @@
                         <a:rPr sz="900">
                           <a:latin typeface="Segoe UI"/>
                         </a:rPr>
-                        <a:t>Fleet Bound Premium: $850,036.87</a:t>
+                        <a:t>Fleet Bound Premium: $850,018.82</a:t>
                       </a:r>
                     </a:p>
                   </a:txBody>
@@ -3766,7 +3766,7 @@
                         <a:rPr sz="900">
                           <a:latin typeface="Segoe UI"/>
                         </a:rPr>
-                        <a:t>Non-Fleet Subs: 2893  |  Binds: 157</a:t>
+                        <a:t>Non-Fleet Subs: 2894  |  Binds: 158</a:t>
                       </a:r>
                     </a:p>
                   </a:txBody>
@@ -3803,7 +3803,7 @@
                         <a:rPr sz="900">
                           <a:latin typeface="Segoe UI"/>
                         </a:rPr>
-                        <a:t>Non-Fleet Bound Premium: $2,903,557.52</a:t>
+                        <a:t>Non-Fleet Bound Premium: $2,904,125.57</a:t>
                       </a:r>
                     </a:p>
                   </a:txBody>
@@ -4428,7 +4428,7 @@
                           </a:solidFill>
                           <a:latin typeface="Segoe UI"/>
                         </a:rPr>
-                        <a:t>591</a:t>
+                        <a:t>593</a:t>
                       </a:r>
                     </a:p>
                   </a:txBody>
@@ -4581,7 +4581,7 @@
                         <a:rPr sz="800">
                           <a:latin typeface="Segoe UI"/>
                         </a:rPr>
-                        <a:t>9.2%</a:t>
+                        <a:t>9.4%</a:t>
                       </a:r>
                     </a:p>
                   </a:txBody>
@@ -4624,7 +4624,7 @@
                           </a:solidFill>
                           <a:latin typeface="Segoe UI"/>
                         </a:rPr>
-                        <a:t>10.5%</a:t>
+                        <a:t>10.6%</a:t>
                       </a:r>
                     </a:p>
                   </a:txBody>
@@ -4664,7 +4664,7 @@
                         <a:rPr sz="800">
                           <a:latin typeface="Segoe UI"/>
                         </a:rPr>
-                        <a:t>13.0%</a:t>
+                        <a:t>13.3%</a:t>
                       </a:r>
                     </a:p>
                   </a:txBody>
@@ -4707,7 +4707,7 @@
                           </a:solidFill>
                           <a:latin typeface="Segoe UI"/>
                         </a:rPr>
-                        <a:t>10.5%</a:t>
+                        <a:t>10.6%</a:t>
                       </a:r>
                     </a:p>
                   </a:txBody>
@@ -4747,7 +4747,7 @@
                         <a:rPr sz="800">
                           <a:latin typeface="Segoe UI"/>
                         </a:rPr>
-                        <a:t>13.0%</a:t>
+                        <a:t>12.8%</a:t>
                       </a:r>
                     </a:p>
                   </a:txBody>
@@ -4866,7 +4866,7 @@
                         <a:rPr sz="800">
                           <a:latin typeface="Segoe UI"/>
                         </a:rPr>
-                        <a:t>46</a:t>
+                        <a:t>47</a:t>
                       </a:r>
                     </a:p>
                   </a:txBody>
@@ -4906,7 +4906,7 @@
                           </a:solidFill>
                           <a:latin typeface="Segoe UI"/>
                         </a:rPr>
-                        <a:t>80</a:t>
+                        <a:t>81</a:t>
                       </a:r>
                     </a:p>
                   </a:txBody>
@@ -4943,7 +4943,7 @@
                         <a:rPr sz="800">
                           <a:latin typeface="Segoe UI"/>
                         </a:rPr>
-                        <a:t>54</a:t>
+                        <a:t>55</a:t>
                       </a:r>
                     </a:p>
                   </a:txBody>
@@ -4983,7 +4983,7 @@
                           </a:solidFill>
                           <a:latin typeface="Segoe UI"/>
                         </a:rPr>
-                        <a:t>62</a:t>
+                        <a:t>63</a:t>
                       </a:r>
                     </a:p>
                   </a:txBody>
@@ -5020,7 +5020,7 @@
                         <a:rPr sz="800">
                           <a:latin typeface="Segoe UI"/>
                         </a:rPr>
-                        <a:t>50</a:t>
+                        <a:t>49</a:t>
                       </a:r>
                     </a:p>
                   </a:txBody>
@@ -5262,7 +5262,7 @@
                           </a:solidFill>
                           <a:latin typeface="Segoe UI"/>
                         </a:rPr>
-                        <a:t>$770.8K</a:t>
+                        <a:t>$771.3K</a:t>
                       </a:r>
                     </a:p>
                   </a:txBody>

--- a/generated/Tier 1 Broker Scorecards/United Advantage Insurance Services_Broker_Scorecard.pptx
+++ b/generated/Tier 1 Broker Scorecards/United Advantage Insurance Services_Broker_Scorecard.pptx
@@ -3357,7 +3357,7 @@
                         <a:rPr sz="800">
                           <a:latin typeface="Segoe UI"/>
                         </a:rPr>
-                        <a:t>$5,313,121.90 / $7,672,226.88 / $3,754,144.39</a:t>
+                        <a:t>$5,313,121.90 / $7,153,111.43 / $3,754,144.39</a:t>
                       </a:r>
                     </a:p>
                   </a:txBody>
@@ -3394,7 +3394,7 @@
                         <a:rPr sz="900">
                           <a:latin typeface="Segoe UI"/>
                         </a:rPr>
-                        <a:t>Tier 1  |  5.61% / 15.00%</a:t>
+                        <a:t>Tier 1  |  5.60% / 15.00%</a:t>
                       </a:r>
                     </a:p>
                   </a:txBody>
@@ -3766,7 +3766,7 @@
                         <a:rPr sz="900">
                           <a:latin typeface="Segoe UI"/>
                         </a:rPr>
-                        <a:t>Non-Fleet Subs: 2894  |  Binds: 158</a:t>
+                        <a:t>Non-Fleet Subs: 2896  |  Binds: 158</a:t>
                       </a:r>
                     </a:p>
                   </a:txBody>
@@ -4428,7 +4428,7 @@
                           </a:solidFill>
                           <a:latin typeface="Segoe UI"/>
                         </a:rPr>
-                        <a:t>593</a:t>
+                        <a:t>595</a:t>
                       </a:r>
                     </a:p>
                   </a:txBody>
@@ -4500,9 +4500,12 @@
                       <a:pPr algn="ctr"/>
                       <a:r>
                         <a:rPr sz="800">
+                          <a:solidFill>
+                            <a:srgbClr val="DC2626"/>
+                          </a:solidFill>
                           <a:latin typeface="Segoe UI"/>
                         </a:rPr>
-                        <a:t/>
+                        <a:t>2</a:t>
                       </a:r>
                     </a:p>
                   </a:txBody>
@@ -4581,7 +4584,7 @@
                         <a:rPr sz="800">
                           <a:latin typeface="Segoe UI"/>
                         </a:rPr>
-                        <a:t>9.4%</a:t>
+                        <a:t>9.2%</a:t>
                       </a:r>
                     </a:p>
                   </a:txBody>
@@ -4747,7 +4750,7 @@
                         <a:rPr sz="800">
                           <a:latin typeface="Segoe UI"/>
                         </a:rPr>
-                        <a:t>12.8%</a:t>
+                        <a:t>13.3%</a:t>
                       </a:r>
                     </a:p>
                   </a:txBody>
@@ -4866,7 +4869,7 @@
                         <a:rPr sz="800">
                           <a:latin typeface="Segoe UI"/>
                         </a:rPr>
-                        <a:t>47</a:t>
+                        <a:t>46</a:t>
                       </a:r>
                     </a:p>
                   </a:txBody>
@@ -5020,7 +5023,7 @@
                         <a:rPr sz="800">
                           <a:latin typeface="Segoe UI"/>
                         </a:rPr>
-                        <a:t>49</a:t>
+                        <a:t>51</a:t>
                       </a:r>
                     </a:p>
                   </a:txBody>
